--- a/egstat_prezentacio_v2.pptx
+++ b/egstat_prezentacio_v2.pptx
@@ -2808,8 +2808,8 @@
         </p:nvSpPr>
         <p:spPr>
           <a:xfrm>
-            <a:off x="8191500" y="1695450"/>
-            <a:ext cx="2762250" cy="2762250"/>
+            <a:off x="8191500" y="1428750"/>
+            <a:ext cx="2762250" cy="4191000"/>
           </a:xfrm>
           <a:prstGeom prst="roundRect">
             <a:avLst>
@@ -4342,7 +4342,7 @@
         <p:spPr>
           <a:xfrm>
             <a:off x="8953500" y="1695450"/>
-            <a:ext cx="2000250" cy="3295650"/>
+            <a:ext cx="2000250" cy="4095750"/>
           </a:xfrm>
           <a:prstGeom prst="roundRect">
             <a:avLst>
@@ -14283,7 +14283,7 @@
         </p:nvSpPr>
         <p:spPr>
           <a:xfrm>
-            <a:off x="952500" y="5181600"/>
+            <a:off x="1095375" y="5181600"/>
             <a:ext cx="4000500" cy="228600"/>
           </a:xfrm>
           <a:prstGeom prst="rect">
@@ -14299,7 +14299,7 @@
           <a:bodyPr/>
           <a:lstStyle/>
           <a:p>
-            <a:pPr>
+            <a:pPr algn="ctr">
               <a:buNone/>
               <a:defRPr sz="1350" b="1">
                 <a:solidFill>
@@ -14308,13 +14308,42 @@
               </a:defRPr>
             </a:pPr>
             <a:r>
-              <a:rPr sz="1350" b="1">
+              <a:rPr sz="1350" b="1" dirty="0">
                 <a:solidFill>
                   <a:srgbClr val="081C15"/>
                 </a:solidFill>
               </a:rPr>
-              <a:t>ROC AUC: rangsorolási képesség</a:t>
-            </a:r>
+              <a:t>ROC AUC: </a:t>
+            </a:r>
+            <a:r>
+              <a:rPr sz="1350" b="1" dirty="0" err="1">
+                <a:solidFill>
+                  <a:srgbClr val="081C15"/>
+                </a:solidFill>
+              </a:rPr>
+              <a:t>rangsorolási</a:t>
+            </a:r>
+            <a:r>
+              <a:rPr sz="1350" b="1" dirty="0">
+                <a:solidFill>
+                  <a:srgbClr val="081C15"/>
+                </a:solidFill>
+              </a:rPr>
+              <a:t> </a:t>
+            </a:r>
+            <a:r>
+              <a:rPr sz="1350" b="1" dirty="0" err="1">
+                <a:solidFill>
+                  <a:srgbClr val="081C15"/>
+                </a:solidFill>
+              </a:rPr>
+              <a:t>képesség</a:t>
+            </a:r>
+            <a:endParaRPr sz="1350" b="1" dirty="0">
+              <a:solidFill>
+                <a:srgbClr val="081C15"/>
+              </a:solidFill>
+            </a:endParaRPr>
           </a:p>
         </p:txBody>
       </p:sp>
@@ -14334,7 +14363,7 @@
         </p:nvSpPr>
         <p:spPr>
           <a:xfrm>
-            <a:off x="6400800" y="5181600"/>
+            <a:off x="6353175" y="5181600"/>
             <a:ext cx="4572000" cy="228600"/>
           </a:xfrm>
           <a:prstGeom prst="rect">
@@ -14350,7 +14379,7 @@
           <a:bodyPr/>
           <a:lstStyle/>
           <a:p>
-            <a:pPr>
+            <a:pPr algn="ctr">
               <a:buNone/>
               <a:defRPr sz="1350" b="1">
                 <a:solidFill>
@@ -14359,13 +14388,82 @@
               </a:defRPr>
             </a:pPr>
             <a:r>
-              <a:rPr sz="1350" b="1">
+              <a:rPr sz="1350" b="1" dirty="0" err="1">
                 <a:solidFill>
                   <a:srgbClr val="081C15"/>
                 </a:solidFill>
               </a:rPr>
-              <a:t>Konfúziós mátrix: a küszöbválasztás gyakorlati ára</a:t>
-            </a:r>
+              <a:t>Konfúziós</a:t>
+            </a:r>
+            <a:r>
+              <a:rPr sz="1350" b="1" dirty="0">
+                <a:solidFill>
+                  <a:srgbClr val="081C15"/>
+                </a:solidFill>
+              </a:rPr>
+              <a:t> </a:t>
+            </a:r>
+            <a:r>
+              <a:rPr sz="1350" b="1" dirty="0" err="1">
+                <a:solidFill>
+                  <a:srgbClr val="081C15"/>
+                </a:solidFill>
+              </a:rPr>
+              <a:t>mátrix</a:t>
+            </a:r>
+            <a:r>
+              <a:rPr sz="1350" b="1" dirty="0">
+                <a:solidFill>
+                  <a:srgbClr val="081C15"/>
+                </a:solidFill>
+              </a:rPr>
+              <a:t>: a </a:t>
+            </a:r>
+            <a:r>
+              <a:rPr sz="1350" b="1" dirty="0" err="1">
+                <a:solidFill>
+                  <a:srgbClr val="081C15"/>
+                </a:solidFill>
+              </a:rPr>
+              <a:t>küszöbválasztás</a:t>
+            </a:r>
+            <a:r>
+              <a:rPr sz="1350" b="1" dirty="0">
+                <a:solidFill>
+                  <a:srgbClr val="081C15"/>
+                </a:solidFill>
+              </a:rPr>
+              <a:t> </a:t>
+            </a:r>
+            <a:r>
+              <a:rPr sz="1350" b="1" dirty="0" err="1">
+                <a:solidFill>
+                  <a:srgbClr val="081C15"/>
+                </a:solidFill>
+              </a:rPr>
+              <a:t>gyakorlati</a:t>
+            </a:r>
+            <a:r>
+              <a:rPr sz="1350" b="1" dirty="0">
+                <a:solidFill>
+                  <a:srgbClr val="081C15"/>
+                </a:solidFill>
+              </a:rPr>
+              <a:t> </a:t>
+            </a:r>
+            <a:r>
+              <a:rPr sz="1350" b="1" dirty="0" err="1">
+                <a:solidFill>
+                  <a:srgbClr val="081C15"/>
+                </a:solidFill>
+              </a:rPr>
+              <a:t>ára</a:t>
+            </a:r>
+            <a:endParaRPr sz="1350" b="1" dirty="0">
+              <a:solidFill>
+                <a:srgbClr val="081C15"/>
+              </a:solidFill>
+            </a:endParaRPr>
           </a:p>
         </p:txBody>
       </p:sp>
@@ -14849,8 +14947,8 @@
         </p:nvSpPr>
         <p:spPr>
           <a:xfrm>
-            <a:off x="7810500" y="1752600"/>
-            <a:ext cx="2857500" cy="2857500"/>
+            <a:off x="7810500" y="1466850"/>
+            <a:ext cx="2857500" cy="4000500"/>
           </a:xfrm>
           <a:prstGeom prst="roundRect">
             <a:avLst>
@@ -14979,16 +15077,184 @@
               </a:defRPr>
             </a:pPr>
             <a:r>
-              <a:rPr sz="1350">
+              <a:rPr sz="1350" dirty="0">
                 <a:solidFill>
                   <a:srgbClr val="1C2B27"/>
                 </a:solidFill>
               </a:rPr>
-              <a:t>A logisztikus regresszió együtthatói közvetlenül mutatják a változók irányát és relatív erősségét.</a:t>
-            </a:r>
-          </a:p>
-          <a:p>
-            <a:endParaRPr sz="1350">
+              <a:t>A </a:t>
+            </a:r>
+            <a:r>
+              <a:rPr sz="1350" dirty="0" err="1">
+                <a:solidFill>
+                  <a:srgbClr val="1C2B27"/>
+                </a:solidFill>
+              </a:rPr>
+              <a:t>logisztikus</a:t>
+            </a:r>
+            <a:r>
+              <a:rPr sz="1350" dirty="0">
+                <a:solidFill>
+                  <a:srgbClr val="1C2B27"/>
+                </a:solidFill>
+              </a:rPr>
+              <a:t> </a:t>
+            </a:r>
+            <a:r>
+              <a:rPr sz="1350" dirty="0" err="1">
+                <a:solidFill>
+                  <a:srgbClr val="1C2B27"/>
+                </a:solidFill>
+              </a:rPr>
+              <a:t>regresszió</a:t>
+            </a:r>
+            <a:r>
+              <a:rPr sz="1350" dirty="0">
+                <a:solidFill>
+                  <a:srgbClr val="1C2B27"/>
+                </a:solidFill>
+              </a:rPr>
+              <a:t> </a:t>
+            </a:r>
+            <a:r>
+              <a:rPr sz="1350" dirty="0" err="1">
+                <a:solidFill>
+                  <a:srgbClr val="1C2B27"/>
+                </a:solidFill>
+              </a:rPr>
+              <a:t>együtthatói</a:t>
+            </a:r>
+            <a:r>
+              <a:rPr sz="1350" dirty="0">
+                <a:solidFill>
+                  <a:srgbClr val="1C2B27"/>
+                </a:solidFill>
+              </a:rPr>
+              <a:t> </a:t>
+            </a:r>
+            <a:r>
+              <a:rPr sz="1350" dirty="0" err="1">
+                <a:solidFill>
+                  <a:srgbClr val="1C2B27"/>
+                </a:solidFill>
+              </a:rPr>
+              <a:t>közvetlenül</a:t>
+            </a:r>
+            <a:r>
+              <a:rPr sz="1350" dirty="0">
+                <a:solidFill>
+                  <a:srgbClr val="1C2B27"/>
+                </a:solidFill>
+              </a:rPr>
+              <a:t> </a:t>
+            </a:r>
+            <a:r>
+              <a:rPr sz="1350" dirty="0" err="1">
+                <a:solidFill>
+                  <a:srgbClr val="1C2B27"/>
+                </a:solidFill>
+              </a:rPr>
+              <a:t>mutatják</a:t>
+            </a:r>
+            <a:r>
+              <a:rPr sz="1350" dirty="0">
+                <a:solidFill>
+                  <a:srgbClr val="1C2B27"/>
+                </a:solidFill>
+              </a:rPr>
+              <a:t> a </a:t>
+            </a:r>
+            <a:r>
+              <a:rPr sz="1350" dirty="0" err="1">
+                <a:solidFill>
+                  <a:srgbClr val="1C2B27"/>
+                </a:solidFill>
+              </a:rPr>
+              <a:t>változók</a:t>
+            </a:r>
+            <a:r>
+              <a:rPr sz="1350" dirty="0">
+                <a:solidFill>
+                  <a:srgbClr val="1C2B27"/>
+                </a:solidFill>
+              </a:rPr>
+              <a:t> </a:t>
+            </a:r>
+            <a:r>
+              <a:rPr sz="1350" dirty="0" err="1">
+                <a:solidFill>
+                  <a:srgbClr val="1C2B27"/>
+                </a:solidFill>
+              </a:rPr>
+              <a:t>irányát</a:t>
+            </a:r>
+            <a:r>
+              <a:rPr sz="1350" dirty="0">
+                <a:solidFill>
+                  <a:srgbClr val="1C2B27"/>
+                </a:solidFill>
+              </a:rPr>
+              <a:t> </a:t>
+            </a:r>
+            <a:r>
+              <a:rPr sz="1350" dirty="0" err="1">
+                <a:solidFill>
+                  <a:srgbClr val="1C2B27"/>
+                </a:solidFill>
+              </a:rPr>
+              <a:t>és</a:t>
+            </a:r>
+            <a:r>
+              <a:rPr sz="1350" dirty="0">
+                <a:solidFill>
+                  <a:srgbClr val="1C2B27"/>
+                </a:solidFill>
+              </a:rPr>
+              <a:t> </a:t>
+            </a:r>
+            <a:r>
+              <a:rPr sz="1350" dirty="0" err="1">
+                <a:solidFill>
+                  <a:srgbClr val="1C2B27"/>
+                </a:solidFill>
+              </a:rPr>
+              <a:t>relatív</a:t>
+            </a:r>
+            <a:r>
+              <a:rPr sz="1350" dirty="0">
+                <a:solidFill>
+                  <a:srgbClr val="1C2B27"/>
+                </a:solidFill>
+              </a:rPr>
+              <a:t> </a:t>
+            </a:r>
+            <a:r>
+              <a:rPr sz="1350" dirty="0" err="1">
+                <a:solidFill>
+                  <a:srgbClr val="1C2B27"/>
+                </a:solidFill>
+              </a:rPr>
+              <a:t>erősségét</a:t>
+            </a:r>
+            <a:r>
+              <a:rPr lang="hu-HU" sz="1350" dirty="0">
+                <a:solidFill>
+                  <a:srgbClr val="1C2B27"/>
+                </a:solidFill>
+              </a:rPr>
+              <a:t> (standardizált)</a:t>
+            </a:r>
+            <a:r>
+              <a:rPr sz="1350" dirty="0">
+                <a:solidFill>
+                  <a:srgbClr val="1C2B27"/>
+                </a:solidFill>
+              </a:rPr>
+              <a:t>.</a:t>
+            </a:r>
+          </a:p>
+          <a:p>
+            <a:endParaRPr sz="1350" dirty="0">
               <a:solidFill>
                 <a:srgbClr val="1C2B27"/>
               </a:solidFill>
@@ -15004,12 +15270,92 @@
               </a:defRPr>
             </a:pPr>
             <a:r>
-              <a:rPr sz="1350">
+              <a:rPr sz="1350" dirty="0">
                 <a:solidFill>
                   <a:srgbClr val="1C2B27"/>
                 </a:solidFill>
               </a:rPr>
-              <a:t>A Glucose és a BMI volt a két legerősebb pozitív prediktor.</a:t>
+              <a:t>A Glucose </a:t>
+            </a:r>
+            <a:r>
+              <a:rPr sz="1350" dirty="0" err="1">
+                <a:solidFill>
+                  <a:srgbClr val="1C2B27"/>
+                </a:solidFill>
+              </a:rPr>
+              <a:t>és</a:t>
+            </a:r>
+            <a:r>
+              <a:rPr sz="1350" dirty="0">
+                <a:solidFill>
+                  <a:srgbClr val="1C2B27"/>
+                </a:solidFill>
+              </a:rPr>
+              <a:t> a BMI volt a </a:t>
+            </a:r>
+            <a:r>
+              <a:rPr sz="1350" dirty="0" err="1">
+                <a:solidFill>
+                  <a:srgbClr val="1C2B27"/>
+                </a:solidFill>
+              </a:rPr>
+              <a:t>két</a:t>
+            </a:r>
+            <a:r>
+              <a:rPr sz="1350" dirty="0">
+                <a:solidFill>
+                  <a:srgbClr val="1C2B27"/>
+                </a:solidFill>
+              </a:rPr>
+              <a:t> </a:t>
+            </a:r>
+            <a:r>
+              <a:rPr sz="1350" dirty="0" err="1">
+                <a:solidFill>
+                  <a:srgbClr val="1C2B27"/>
+                </a:solidFill>
+              </a:rPr>
+              <a:t>legerősebb</a:t>
+            </a:r>
+            <a:r>
+              <a:rPr sz="1350" dirty="0">
+                <a:solidFill>
+                  <a:srgbClr val="1C2B27"/>
+                </a:solidFill>
+              </a:rPr>
+              <a:t> </a:t>
+            </a:r>
+            <a:r>
+              <a:rPr sz="1350" dirty="0" err="1">
+                <a:solidFill>
+                  <a:srgbClr val="1C2B27"/>
+                </a:solidFill>
+              </a:rPr>
+              <a:t>pozitív</a:t>
+            </a:r>
+            <a:r>
+              <a:rPr sz="1350" dirty="0">
+                <a:solidFill>
+                  <a:srgbClr val="1C2B27"/>
+                </a:solidFill>
+              </a:rPr>
+              <a:t> </a:t>
+            </a:r>
+            <a:r>
+              <a:rPr sz="1350" dirty="0" err="1">
+                <a:solidFill>
+                  <a:srgbClr val="1C2B27"/>
+                </a:solidFill>
+              </a:rPr>
+              <a:t>prediktor</a:t>
+            </a:r>
+            <a:r>
+              <a:rPr sz="1350" dirty="0">
+                <a:solidFill>
+                  <a:srgbClr val="1C2B27"/>
+                </a:solidFill>
+              </a:rPr>
+              <a:t>.</a:t>
             </a:r>
           </a:p>
         </p:txBody>

--- a/egstat_prezentacio_v2.pptx
+++ b/egstat_prezentacio_v2.pptx
@@ -5,7 +5,7 @@
     <p:sldMasterId id="2147483648" r:id="rId1"/>
   </p:sldMasterIdLst>
   <p:notesMasterIdLst>
-    <p:notesMasterId r:id="rId14"/>
+    <p:notesMasterId r:id="rId15"/>
   </p:notesMasterIdLst>
   <p:sldIdLst>
     <p:sldId id="256" r:id="rId2"/>
@@ -19,7 +19,8 @@
     <p:sldId id="264" r:id="rId10"/>
     <p:sldId id="265" r:id="rId11"/>
     <p:sldId id="266" r:id="rId12"/>
-    <p:sldId id="267" r:id="rId13"/>
+    <p:sldId id="268" r:id="rId13"/>
+    <p:sldId id="267" r:id="rId14"/>
   </p:sldIdLst>
   <p:sldSz cx="12192000" cy="6858000"/>
   <p:notesSz cx="6858000" cy="9144000"/>
@@ -118,6 +119,11 @@
       </a:defRPr>
     </a:lvl9pPr>
   </p:defaultTextStyle>
+  <p:extLst>
+    <p:ext uri="{EFAFB233-063F-42B5-8137-9DF3F51BA10A}">
+      <p15:sldGuideLst xmlns:p15="http://schemas.microsoft.com/office/powerpoint/2012/main"/>
+    </p:ext>
+  </p:extLst>
 </p:presentation>
 </file>
 
@@ -825,6 +831,110 @@
 </file>
 
 <file path=ppt/notesSlides/notesSlide12.xml><?xml version="1.0" encoding="utf-8"?>
+<p:notes xmlns:a="http://schemas.openxmlformats.org/drawingml/2006/main" xmlns:r="http://schemas.openxmlformats.org/officeDocument/2006/relationships" xmlns:p="http://schemas.openxmlformats.org/presentationml/2006/main">
+  <p:cSld>
+    <p:spTree>
+      <p:nvGrpSpPr>
+        <p:cNvPr id="1" name="">
+          <a:extLst>
+            <a:ext uri="{FF2B5EF4-FFF2-40B4-BE49-F238E27FC236}">
+              <a16:creationId xmlns:a16="http://schemas.microsoft.com/office/drawing/2014/main" id="{FDCF6EC7-1519-B458-EB84-F9AB358D1FC0}"/>
+            </a:ext>
+          </a:extLst>
+        </p:cNvPr>
+        <p:cNvGrpSpPr/>
+        <p:nvPr/>
+      </p:nvGrpSpPr>
+      <p:grpSpPr>
+        <a:xfrm>
+          <a:off x="0" y="0"/>
+          <a:ext cx="0" cy="0"/>
+          <a:chOff x="0" y="0"/>
+          <a:chExt cx="0" cy="0"/>
+        </a:xfrm>
+      </p:grpSpPr>
+      <p:sp>
+        <p:nvSpPr>
+          <p:cNvPr id="2" name="Slide Image Placeholder 1">
+            <a:extLst>
+              <a:ext uri="{FF2B5EF4-FFF2-40B4-BE49-F238E27FC236}">
+                <a16:creationId xmlns:a16="http://schemas.microsoft.com/office/drawing/2014/main" id="{10BA7078-5DD3-A22B-A4BD-5675EC94EFC4}"/>
+              </a:ext>
+            </a:extLst>
+          </p:cNvPr>
+          <p:cNvSpPr>
+            <a:spLocks noGrp="1" noRot="1" noChangeAspect="1"/>
+          </p:cNvSpPr>
+          <p:nvPr>
+            <p:ph type="sldImg"/>
+          </p:nvPr>
+        </p:nvSpPr>
+        <p:spPr/>
+      </p:sp>
+      <p:sp>
+        <p:nvSpPr>
+          <p:cNvPr id="3" name="Notes Placeholder 2">
+            <a:extLst>
+              <a:ext uri="{FF2B5EF4-FFF2-40B4-BE49-F238E27FC236}">
+                <a16:creationId xmlns:a16="http://schemas.microsoft.com/office/drawing/2014/main" id="{D09B7811-E22C-0652-4821-F741D4682A4D}"/>
+              </a:ext>
+            </a:extLst>
+          </p:cNvPr>
+          <p:cNvSpPr>
+            <a:spLocks noGrp="1"/>
+          </p:cNvSpPr>
+          <p:nvPr>
+            <p:ph type="body" idx="1"/>
+          </p:nvPr>
+        </p:nvSpPr>
+        <p:spPr/>
+        <p:txBody>
+          <a:bodyPr/>
+          <a:lstStyle/>
+          <a:p>
+            <a:endParaRPr dirty="0"/>
+          </a:p>
+        </p:txBody>
+      </p:sp>
+      <p:sp>
+        <p:nvSpPr>
+          <p:cNvPr id="4" name="Slide Number Placeholder 3">
+            <a:extLst>
+              <a:ext uri="{FF2B5EF4-FFF2-40B4-BE49-F238E27FC236}">
+                <a16:creationId xmlns:a16="http://schemas.microsoft.com/office/drawing/2014/main" id="{90A0BB8C-6A27-1F53-7D7A-11B26A635505}"/>
+              </a:ext>
+            </a:extLst>
+          </p:cNvPr>
+          <p:cNvSpPr>
+            <a:spLocks noGrp="1"/>
+          </p:cNvSpPr>
+          <p:nvPr>
+            <p:ph type="sldNum" idx="5"/>
+          </p:nvPr>
+        </p:nvSpPr>
+        <p:spPr/>
+        <p:txBody>
+          <a:bodyPr/>
+          <a:lstStyle/>
+          <a:p>
+            <a:endParaRPr/>
+          </a:p>
+        </p:txBody>
+      </p:sp>
+    </p:spTree>
+    <p:extLst>
+      <p:ext uri="{BB962C8B-B14F-4D97-AF65-F5344CB8AC3E}">
+        <p14:creationId xmlns:p14="http://schemas.microsoft.com/office/powerpoint/2010/main" val="1678647755"/>
+      </p:ext>
+    </p:extLst>
+  </p:cSld>
+  <p:clrMapOvr>
+    <a:masterClrMapping/>
+  </p:clrMapOvr>
+</p:notes>
+</file>
+
+<file path=ppt/notesSlides/notesSlide13.xml><?xml version="1.0" encoding="utf-8"?>
 <p:notes xmlns:a="http://schemas.openxmlformats.org/drawingml/2006/main" xmlns:r="http://schemas.openxmlformats.org/officeDocument/2006/relationships" xmlns:p="http://schemas.openxmlformats.org/presentationml/2006/main">
   <p:cSld>
     <p:spTree>
@@ -3365,13 +3475,82 @@
               </a:defRPr>
             </a:pPr>
             <a:r>
-              <a:rPr sz="2550" b="1">
+              <a:rPr sz="2550" b="1" dirty="0" err="1">
                 <a:solidFill>
                   <a:srgbClr val="081C15"/>
                 </a:solidFill>
               </a:rPr>
-              <a:t>Következtetés: nincs egyetlen abszolút győztes</a:t>
-            </a:r>
+              <a:t>Következtetés</a:t>
+            </a:r>
+            <a:r>
+              <a:rPr sz="2550" b="1" dirty="0">
+                <a:solidFill>
+                  <a:srgbClr val="081C15"/>
+                </a:solidFill>
+              </a:rPr>
+              <a:t>: </a:t>
+            </a:r>
+            <a:r>
+              <a:rPr sz="2550" b="1" dirty="0" err="1">
+                <a:solidFill>
+                  <a:srgbClr val="081C15"/>
+                </a:solidFill>
+              </a:rPr>
+              <a:t>nincs</a:t>
+            </a:r>
+            <a:r>
+              <a:rPr sz="2550" b="1" dirty="0">
+                <a:solidFill>
+                  <a:srgbClr val="081C15"/>
+                </a:solidFill>
+              </a:rPr>
+              <a:t> </a:t>
+            </a:r>
+            <a:r>
+              <a:rPr sz="2550" b="1" dirty="0" err="1">
+                <a:solidFill>
+                  <a:srgbClr val="081C15"/>
+                </a:solidFill>
+              </a:rPr>
+              <a:t>egyetlen</a:t>
+            </a:r>
+            <a:r>
+              <a:rPr sz="2550" b="1" dirty="0">
+                <a:solidFill>
+                  <a:srgbClr val="081C15"/>
+                </a:solidFill>
+              </a:rPr>
+              <a:t> </a:t>
+            </a:r>
+            <a:r>
+              <a:rPr sz="2550" b="1" dirty="0" err="1">
+                <a:solidFill>
+                  <a:srgbClr val="081C15"/>
+                </a:solidFill>
+              </a:rPr>
+              <a:t>abszolút</a:t>
+            </a:r>
+            <a:r>
+              <a:rPr sz="2550" b="1" dirty="0">
+                <a:solidFill>
+                  <a:srgbClr val="081C15"/>
+                </a:solidFill>
+              </a:rPr>
+              <a:t> </a:t>
+            </a:r>
+            <a:r>
+              <a:rPr sz="2550" b="1" dirty="0" err="1">
+                <a:solidFill>
+                  <a:srgbClr val="081C15"/>
+                </a:solidFill>
+              </a:rPr>
+              <a:t>győztes</a:t>
+            </a:r>
+            <a:endParaRPr sz="2550" b="1" dirty="0">
+              <a:solidFill>
+                <a:srgbClr val="081C15"/>
+              </a:solidFill>
+            </a:endParaRPr>
           </a:p>
         </p:txBody>
       </p:sp>
@@ -4663,6 +4842,424 @@
     </p:bg>
     <p:spTree>
       <p:nvGrpSpPr>
+        <p:cNvPr id="1" name="">
+          <a:extLst>
+            <a:ext uri="{FF2B5EF4-FFF2-40B4-BE49-F238E27FC236}">
+              <a16:creationId xmlns:a16="http://schemas.microsoft.com/office/drawing/2014/main" id="{E20A7687-7D2D-FBB1-8942-31802B363070}"/>
+            </a:ext>
+          </a:extLst>
+        </p:cNvPr>
+        <p:cNvGrpSpPr/>
+        <p:nvPr/>
+      </p:nvGrpSpPr>
+      <p:grpSpPr>
+        <a:xfrm>
+          <a:off x="0" y="0"/>
+          <a:ext cx="0" cy="0"/>
+          <a:chOff x="0" y="0"/>
+          <a:chExt cx="0" cy="0"/>
+        </a:xfrm>
+      </p:grpSpPr>
+      <p:sp>
+        <p:nvSpPr>
+          <p:cNvPr id="28" name="Rectangle 27">
+            <a:extLst>
+              <a:ext uri="{FF2B5EF4-FFF2-40B4-BE49-F238E27FC236}">
+                <a16:creationId xmlns:a16="http://schemas.microsoft.com/office/drawing/2014/main" id="{7662CBB2-1664-4D57-9634-B3D8B0CCB52C}"/>
+              </a:ext>
+            </a:extLst>
+          </p:cNvPr>
+          <p:cNvSpPr>
+            <a:spLocks noGrp="1"/>
+          </p:cNvSpPr>
+          <p:nvPr/>
+        </p:nvSpPr>
+        <p:spPr>
+          <a:xfrm>
+            <a:off x="0" y="0"/>
+            <a:ext cx="209550" cy="6858000"/>
+          </a:xfrm>
+          <a:prstGeom prst="rect">
+            <a:avLst/>
+          </a:prstGeom>
+          <a:solidFill>
+            <a:srgbClr val="0E6B3A"/>
+          </a:solidFill>
+          <a:ln w="0">
+            <a:solidFill>
+              <a:srgbClr val="0E6B3A"/>
+            </a:solidFill>
+            <a:prstDash val="solid"/>
+          </a:ln>
+        </p:spPr>
+        <p:txBody>
+          <a:bodyPr/>
+          <a:lstStyle/>
+          <a:p>
+            <a:endParaRPr/>
+          </a:p>
+        </p:txBody>
+      </p:sp>
+      <p:sp>
+        <p:nvSpPr>
+          <p:cNvPr id="2" name="Rectangle 1">
+            <a:extLst>
+              <a:ext uri="{FF2B5EF4-FFF2-40B4-BE49-F238E27FC236}">
+                <a16:creationId xmlns:a16="http://schemas.microsoft.com/office/drawing/2014/main" id="{1ABD1523-E097-C85D-CB8B-B2B1024CC78C}"/>
+              </a:ext>
+            </a:extLst>
+          </p:cNvPr>
+          <p:cNvSpPr>
+            <a:spLocks noGrp="1"/>
+          </p:cNvSpPr>
+          <p:nvPr/>
+        </p:nvSpPr>
+        <p:spPr>
+          <a:xfrm>
+            <a:off x="209550" y="0"/>
+            <a:ext cx="11982450" cy="76200"/>
+          </a:xfrm>
+          <a:prstGeom prst="rect">
+            <a:avLst/>
+          </a:prstGeom>
+          <a:solidFill>
+            <a:srgbClr val="7CCB62"/>
+          </a:solidFill>
+          <a:ln w="0">
+            <a:solidFill>
+              <a:srgbClr val="7CCB62"/>
+            </a:solidFill>
+            <a:prstDash val="solid"/>
+          </a:ln>
+        </p:spPr>
+        <p:txBody>
+          <a:bodyPr/>
+          <a:lstStyle/>
+          <a:p>
+            <a:endParaRPr/>
+          </a:p>
+        </p:txBody>
+      </p:sp>
+      <p:sp>
+        <p:nvSpPr>
+          <p:cNvPr id="3" name="Rectangle 2">
+            <a:extLst>
+              <a:ext uri="{FF2B5EF4-FFF2-40B4-BE49-F238E27FC236}">
+                <a16:creationId xmlns:a16="http://schemas.microsoft.com/office/drawing/2014/main" id="{64F6BC9F-A19F-B4FA-C039-D76DDD2BF2B4}"/>
+              </a:ext>
+            </a:extLst>
+          </p:cNvPr>
+          <p:cNvSpPr>
+            <a:spLocks noGrp="1"/>
+          </p:cNvSpPr>
+          <p:nvPr/>
+        </p:nvSpPr>
+        <p:spPr>
+          <a:xfrm>
+            <a:off x="11239500" y="0"/>
+            <a:ext cx="952500" cy="6858000"/>
+          </a:xfrm>
+          <a:prstGeom prst="rect">
+            <a:avLst/>
+          </a:prstGeom>
+          <a:solidFill>
+            <a:srgbClr val="EEF7F1"/>
+          </a:solidFill>
+          <a:ln w="0">
+            <a:noFill/>
+            <a:prstDash val="solid"/>
+          </a:ln>
+        </p:spPr>
+        <p:txBody>
+          <a:bodyPr/>
+          <a:lstStyle/>
+          <a:p>
+            <a:endParaRPr/>
+          </a:p>
+        </p:txBody>
+      </p:sp>
+      <p:sp>
+        <p:nvSpPr>
+          <p:cNvPr id="20" name="Rounded Rectangle 19">
+            <a:extLst>
+              <a:ext uri="{FF2B5EF4-FFF2-40B4-BE49-F238E27FC236}">
+                <a16:creationId xmlns:a16="http://schemas.microsoft.com/office/drawing/2014/main" id="{64D327C9-07A2-6DAE-5FD5-B75793C5805E}"/>
+              </a:ext>
+            </a:extLst>
+          </p:cNvPr>
+          <p:cNvSpPr>
+            <a:spLocks noGrp="1"/>
+          </p:cNvSpPr>
+          <p:nvPr/>
+        </p:nvSpPr>
+        <p:spPr>
+          <a:xfrm>
+            <a:off x="2279960" y="877236"/>
+            <a:ext cx="7734300" cy="2171700"/>
+          </a:xfrm>
+          <a:prstGeom prst="roundRect">
+            <a:avLst>
+              <a:gd name="adj" fmla="val 12500"/>
+            </a:avLst>
+          </a:prstGeom>
+          <a:solidFill>
+            <a:srgbClr val="F6FBF8"/>
+          </a:solidFill>
+          <a:ln w="9525">
+            <a:solidFill>
+              <a:srgbClr val="D6E6DD"/>
+            </a:solidFill>
+            <a:prstDash val="solid"/>
+          </a:ln>
+        </p:spPr>
+        <p:style>
+          <a:lnRef idx="0">
+            <a:scrgbClr r="0" g="0" b="0"/>
+          </a:lnRef>
+          <a:fillRef idx="0">
+            <a:scrgbClr r="0" g="0" b="0"/>
+          </a:fillRef>
+          <a:effectRef idx="4">
+            <a:scrgbClr r="0" g="0" b="0"/>
+          </a:effectRef>
+          <a:fontRef idx="major"/>
+        </p:style>
+        <p:txBody>
+          <a:bodyPr/>
+          <a:lstStyle/>
+          <a:p>
+            <a:endParaRPr/>
+          </a:p>
+        </p:txBody>
+      </p:sp>
+      <p:sp>
+        <p:nvSpPr>
+          <p:cNvPr id="26" name="Rectangle 25">
+            <a:extLst>
+              <a:ext uri="{FF2B5EF4-FFF2-40B4-BE49-F238E27FC236}">
+                <a16:creationId xmlns:a16="http://schemas.microsoft.com/office/drawing/2014/main" id="{DCB32791-EBF1-74DB-6632-A1BD259DAC9D}"/>
+              </a:ext>
+            </a:extLst>
+          </p:cNvPr>
+          <p:cNvSpPr>
+            <a:spLocks noGrp="1"/>
+          </p:cNvSpPr>
+          <p:nvPr/>
+        </p:nvSpPr>
+        <p:spPr>
+          <a:xfrm>
+            <a:off x="666750" y="6515100"/>
+            <a:ext cx="8858250" cy="171450"/>
+          </a:xfrm>
+          <a:prstGeom prst="rect">
+            <a:avLst/>
+          </a:prstGeom>
+          <a:noFill/>
+          <a:ln w="0">
+            <a:noFill/>
+            <a:prstDash val="solid"/>
+          </a:ln>
+        </p:spPr>
+        <p:txBody>
+          <a:bodyPr/>
+          <a:lstStyle/>
+          <a:p>
+            <a:pPr>
+              <a:defRPr sz="825">
+                <a:solidFill>
+                  <a:srgbClr val="687873"/>
+                </a:solidFill>
+              </a:defRPr>
+            </a:pPr>
+            <a:r>
+              <a:rPr lang="en-US" sz="825" dirty="0"/>
+              <a:t>Forrás: Lakatos Brendon Facebook-</a:t>
+            </a:r>
+            <a:r>
+              <a:rPr lang="en-US" sz="825" dirty="0" err="1"/>
+              <a:t>oldala</a:t>
+            </a:r>
+            <a:r>
+              <a:rPr lang="en-US" sz="825" dirty="0"/>
+              <a:t> (2026), Index</a:t>
+            </a:r>
+          </a:p>
+        </p:txBody>
+      </p:sp>
+      <p:sp>
+        <p:nvSpPr>
+          <p:cNvPr id="27" name="Rectangle 26">
+            <a:extLst>
+              <a:ext uri="{FF2B5EF4-FFF2-40B4-BE49-F238E27FC236}">
+                <a16:creationId xmlns:a16="http://schemas.microsoft.com/office/drawing/2014/main" id="{10F03B9B-D5FD-4A0B-22C6-B0F50B068163}"/>
+              </a:ext>
+            </a:extLst>
+          </p:cNvPr>
+          <p:cNvSpPr>
+            <a:spLocks noGrp="1"/>
+          </p:cNvSpPr>
+          <p:nvPr/>
+        </p:nvSpPr>
+        <p:spPr>
+          <a:xfrm>
+            <a:off x="11239500" y="6477000"/>
+            <a:ext cx="381000" cy="209550"/>
+          </a:xfrm>
+          <a:prstGeom prst="rect">
+            <a:avLst/>
+          </a:prstGeom>
+          <a:noFill/>
+          <a:ln w="0">
+            <a:noFill/>
+            <a:prstDash val="solid"/>
+          </a:ln>
+        </p:spPr>
+        <p:txBody>
+          <a:bodyPr/>
+          <a:lstStyle/>
+          <a:p>
+            <a:pPr>
+              <a:buNone/>
+              <a:defRPr sz="900" b="1">
+                <a:solidFill>
+                  <a:srgbClr val="687873"/>
+                </a:solidFill>
+              </a:defRPr>
+            </a:pPr>
+            <a:r>
+              <a:rPr sz="900" b="1" dirty="0">
+                <a:solidFill>
+                  <a:srgbClr val="687873"/>
+                </a:solidFill>
+              </a:rPr>
+              <a:t>1</a:t>
+            </a:r>
+            <a:r>
+              <a:rPr lang="hu-HU" sz="900" b="1" dirty="0">
+                <a:solidFill>
+                  <a:srgbClr val="687873"/>
+                </a:solidFill>
+              </a:rPr>
+              <a:t>2</a:t>
+            </a:r>
+            <a:endParaRPr sz="900" b="1" dirty="0">
+              <a:solidFill>
+                <a:srgbClr val="687873"/>
+              </a:solidFill>
+            </a:endParaRPr>
+          </a:p>
+        </p:txBody>
+      </p:sp>
+      <p:sp>
+        <p:nvSpPr>
+          <p:cNvPr id="29" name="TextBox 28">
+            <a:extLst>
+              <a:ext uri="{FF2B5EF4-FFF2-40B4-BE49-F238E27FC236}">
+                <a16:creationId xmlns:a16="http://schemas.microsoft.com/office/drawing/2014/main" id="{5F12A23B-9147-F043-AF14-8B453476C929}"/>
+              </a:ext>
+            </a:extLst>
+          </p:cNvPr>
+          <p:cNvSpPr txBox="1"/>
+          <p:nvPr/>
+        </p:nvSpPr>
+        <p:spPr>
+          <a:xfrm>
+            <a:off x="3402980" y="1137744"/>
+            <a:ext cx="5386039" cy="1477328"/>
+          </a:xfrm>
+          <a:prstGeom prst="rect">
+            <a:avLst/>
+          </a:prstGeom>
+          <a:noFill/>
+        </p:spPr>
+        <p:txBody>
+          <a:bodyPr wrap="square" rtlCol="0">
+            <a:spAutoFit/>
+          </a:bodyPr>
+          <a:lstStyle/>
+          <a:p>
+            <a:pPr algn="ctr"/>
+            <a:r>
+              <a:rPr lang="en-US" sz="4500" dirty="0" err="1"/>
+              <a:t>Köszönjük</a:t>
+            </a:r>
+            <a:r>
+              <a:rPr lang="en-US" sz="4500" dirty="0"/>
+              <a:t> a </a:t>
+            </a:r>
+            <a:r>
+              <a:rPr lang="en-US" sz="4500" dirty="0" err="1"/>
+              <a:t>figyelmet</a:t>
+            </a:r>
+            <a:r>
+              <a:rPr lang="en-US" sz="4500" dirty="0"/>
+              <a:t>!</a:t>
+            </a:r>
+          </a:p>
+        </p:txBody>
+      </p:sp>
+      <p:pic>
+        <p:nvPicPr>
+          <p:cNvPr id="31" name="Picture 30">
+            <a:extLst>
+              <a:ext uri="{FF2B5EF4-FFF2-40B4-BE49-F238E27FC236}">
+                <a16:creationId xmlns:a16="http://schemas.microsoft.com/office/drawing/2014/main" id="{C9EA2A7C-97C6-72D9-78E6-9608AC9FA0D1}"/>
+              </a:ext>
+            </a:extLst>
+          </p:cNvPr>
+          <p:cNvPicPr>
+            <a:picLocks noChangeAspect="1"/>
+          </p:cNvPicPr>
+          <p:nvPr/>
+        </p:nvPicPr>
+        <p:blipFill>
+          <a:blip r:embed="rId3">
+            <a:extLst>
+              <a:ext uri="{28A0092B-C50C-407E-A947-70E740481C1C}">
+                <a14:useLocalDpi xmlns:a14="http://schemas.microsoft.com/office/drawing/2010/main" val="0"/>
+              </a:ext>
+            </a:extLst>
+          </a:blip>
+          <a:stretch>
+            <a:fillRect/>
+          </a:stretch>
+        </p:blipFill>
+        <p:spPr>
+          <a:xfrm>
+            <a:off x="4319160" y="3429000"/>
+            <a:ext cx="3553677" cy="2366944"/>
+          </a:xfrm>
+          <a:prstGeom prst="rect">
+            <a:avLst/>
+          </a:prstGeom>
+        </p:spPr>
+      </p:pic>
+    </p:spTree>
+    <p:extLst>
+      <p:ext uri="{BB962C8B-B14F-4D97-AF65-F5344CB8AC3E}">
+        <p14:creationId xmlns:p14="http://schemas.microsoft.com/office/powerpoint/2010/main" val="3748069959"/>
+      </p:ext>
+    </p:extLst>
+  </p:cSld>
+  <p:clrMapOvr>
+    <a:masterClrMapping/>
+  </p:clrMapOvr>
+</p:sld>
+</file>
+
+<file path=ppt/slides/slide13.xml><?xml version="1.0" encoding="utf-8"?>
+<p:sld xmlns:a="http://schemas.openxmlformats.org/drawingml/2006/main" xmlns:r="http://schemas.openxmlformats.org/officeDocument/2006/relationships" xmlns:p="http://schemas.openxmlformats.org/presentationml/2006/main">
+  <p:cSld>
+    <p:bg>
+      <p:bgPr>
+        <a:solidFill>
+          <a:srgbClr val="F7FAF8"/>
+        </a:solidFill>
+        <a:effectLst/>
+      </p:bgPr>
+    </p:bg>
+    <p:spTree>
+      <p:nvGrpSpPr>
         <p:cNvPr id="1" name=""/>
         <p:cNvGrpSpPr/>
         <p:nvPr/>
@@ -5126,12 +5723,445 @@
               </a:defRPr>
             </a:pPr>
             <a:r>
+              <a:rPr sz="840" dirty="0" err="1">
+                <a:solidFill>
+                  <a:srgbClr val="1C2B27"/>
+                </a:solidFill>
+              </a:rPr>
+              <a:t>Breiman</a:t>
+            </a:r>
+            <a:r>
+              <a:rPr sz="840" dirty="0">
+                <a:solidFill>
+                  <a:srgbClr val="1C2B27"/>
+                </a:solidFill>
+              </a:rPr>
+              <a:t>, L. (2001). Random forests. Machine Learning, 45, 5-32. https://</a:t>
+            </a:r>
+            <a:r>
+              <a:rPr sz="840" dirty="0" err="1">
+                <a:solidFill>
+                  <a:srgbClr val="1C2B27"/>
+                </a:solidFill>
+              </a:rPr>
+              <a:t>doi.org</a:t>
+            </a:r>
+            <a:r>
+              <a:rPr sz="840" dirty="0">
+                <a:solidFill>
+                  <a:srgbClr val="1C2B27"/>
+                </a:solidFill>
+              </a:rPr>
+              <a:t>/10.1023/A:1010933404324</a:t>
+            </a:r>
+          </a:p>
+          <a:p>
+            <a:endParaRPr sz="840" dirty="0">
+              <a:solidFill>
+                <a:srgbClr val="1C2B27"/>
+              </a:solidFill>
+            </a:endParaRPr>
+          </a:p>
+          <a:p>
+            <a:pPr>
+              <a:buNone/>
+              <a:defRPr sz="840">
+                <a:solidFill>
+                  <a:srgbClr val="1C2B27"/>
+                </a:solidFill>
+              </a:defRPr>
+            </a:pPr>
+            <a:r>
+              <a:rPr sz="840" dirty="0">
+                <a:solidFill>
+                  <a:srgbClr val="1C2B27"/>
+                </a:solidFill>
+              </a:rPr>
+              <a:t>Chen, T., </a:t>
+            </a:r>
+            <a:r>
+              <a:rPr sz="840" dirty="0" err="1">
+                <a:solidFill>
+                  <a:srgbClr val="1C2B27"/>
+                </a:solidFill>
+              </a:rPr>
+              <a:t>és</a:t>
+            </a:r>
+            <a:r>
+              <a:rPr sz="840" dirty="0">
+                <a:solidFill>
+                  <a:srgbClr val="1C2B27"/>
+                </a:solidFill>
+              </a:rPr>
+              <a:t> </a:t>
+            </a:r>
+            <a:r>
+              <a:rPr sz="840" dirty="0" err="1">
+                <a:solidFill>
+                  <a:srgbClr val="1C2B27"/>
+                </a:solidFill>
+              </a:rPr>
+              <a:t>Guestrin</a:t>
+            </a:r>
+            <a:r>
+              <a:rPr sz="840" dirty="0">
+                <a:solidFill>
+                  <a:srgbClr val="1C2B27"/>
+                </a:solidFill>
+              </a:rPr>
+              <a:t>, C. (2016). </a:t>
+            </a:r>
+            <a:r>
+              <a:rPr sz="840" dirty="0" err="1">
+                <a:solidFill>
+                  <a:srgbClr val="1C2B27"/>
+                </a:solidFill>
+              </a:rPr>
+              <a:t>XGBoost</a:t>
+            </a:r>
+            <a:r>
+              <a:rPr sz="840" dirty="0">
+                <a:solidFill>
+                  <a:srgbClr val="1C2B27"/>
+                </a:solidFill>
+              </a:rPr>
+              <a:t>: A scalable tree boosting system. In Proceedings of the 22nd ACM SIGKDD International Conference on Knowledge Discovery and Data Mining (pp. 785-794). Association for Computing Machinery. </a:t>
+            </a:r>
+            <a:r>
+              <a:rPr sz="840" dirty="0">
+                <a:solidFill>
+                  <a:srgbClr val="1C2B27"/>
+                </a:solidFill>
+                <a:hlinkClick r:id="rId3"/>
+              </a:rPr>
+              <a:t>https://doi.org/10.1145/2939672.2939785</a:t>
+            </a:r>
+            <a:endParaRPr lang="hu-HU" sz="840" dirty="0">
+              <a:solidFill>
+                <a:srgbClr val="1C2B27"/>
+              </a:solidFill>
+            </a:endParaRPr>
+          </a:p>
+          <a:p>
+            <a:pPr>
+              <a:buNone/>
+              <a:defRPr sz="840">
+                <a:solidFill>
+                  <a:srgbClr val="1C2B27"/>
+                </a:solidFill>
+              </a:defRPr>
+            </a:pPr>
+            <a:endParaRPr lang="en-US" sz="840" dirty="0">
+              <a:solidFill>
+                <a:srgbClr val="1C2B27"/>
+              </a:solidFill>
+            </a:endParaRPr>
+          </a:p>
+          <a:p>
+            <a:pPr>
+              <a:defRPr sz="840">
+                <a:solidFill>
+                  <a:srgbClr val="1C2B27"/>
+                </a:solidFill>
+              </a:defRPr>
+            </a:pPr>
+            <a:r>
+              <a:rPr lang="en-US" sz="840" dirty="0"/>
+              <a:t>Facebook. (2026. </a:t>
+            </a:r>
+            <a:r>
+              <a:rPr lang="en-US" sz="840" dirty="0" err="1"/>
+              <a:t>június</a:t>
+            </a:r>
+            <a:r>
+              <a:rPr lang="en-US" sz="840" dirty="0"/>
+              <a:t> 20.). </a:t>
+            </a:r>
+            <a:r>
+              <a:rPr lang="en-US" sz="840" dirty="0" err="1"/>
+              <a:t>Képernyőfelvétel</a:t>
+            </a:r>
+            <a:r>
+              <a:rPr lang="en-US" sz="840" dirty="0"/>
+              <a:t> Lakatos Brendon </a:t>
+            </a:r>
+            <a:r>
+              <a:rPr lang="en-US" sz="840" dirty="0" err="1"/>
+              <a:t>szabadulásáról</a:t>
+            </a:r>
+            <a:r>
+              <a:rPr lang="en-US" sz="840" dirty="0"/>
+              <a:t> [</a:t>
+            </a:r>
+            <a:r>
+              <a:rPr lang="en-US" sz="840" dirty="0" err="1"/>
+              <a:t>Képernyőfelvétel</a:t>
+            </a:r>
+            <a:r>
+              <a:rPr lang="en-US" sz="840" dirty="0"/>
+              <a:t>]. Index. https://</a:t>
+            </a:r>
+            <a:r>
+              <a:rPr lang="en-US" sz="840" dirty="0" err="1"/>
+              <a:t>index.hu</a:t>
+            </a:r>
+            <a:r>
+              <a:rPr lang="en-US" sz="840" dirty="0"/>
+              <a:t>/</a:t>
+            </a:r>
+            <a:r>
+              <a:rPr lang="en-US" sz="840" dirty="0" err="1"/>
+              <a:t>mindekozben</a:t>
+            </a:r>
+            <a:r>
+              <a:rPr lang="en-US" sz="840" dirty="0"/>
+              <a:t>/</a:t>
+            </a:r>
+            <a:r>
+              <a:rPr lang="en-US" sz="840" dirty="0" err="1"/>
+              <a:t>poszt</a:t>
+            </a:r>
+            <a:r>
+              <a:rPr lang="en-US" sz="840" dirty="0"/>
+              <a:t>/2026/06/20/kiszabadult-a-bortonbol-lakatos-brendon-koteg-penz-es-vodka-a-szabadulobulin/</a:t>
+            </a:r>
+          </a:p>
+          <a:p>
+            <a:endParaRPr sz="840" dirty="0">
+              <a:solidFill>
+                <a:srgbClr val="1C2B27"/>
+              </a:solidFill>
+            </a:endParaRPr>
+          </a:p>
+          <a:p>
+            <a:pPr>
+              <a:buNone/>
+              <a:defRPr sz="840">
+                <a:solidFill>
+                  <a:srgbClr val="1C2B27"/>
+                </a:solidFill>
+              </a:defRPr>
+            </a:pPr>
+            <a:r>
+              <a:rPr sz="840" dirty="0">
+                <a:solidFill>
+                  <a:srgbClr val="1C2B27"/>
+                </a:solidFill>
+              </a:rPr>
+              <a:t>Fawcett, T. (2006). An introduction to ROC analysis. Pattern Recognition Letters, 27(8), 861-874. https://</a:t>
+            </a:r>
+            <a:r>
+              <a:rPr sz="840" dirty="0" err="1">
+                <a:solidFill>
+                  <a:srgbClr val="1C2B27"/>
+                </a:solidFill>
+              </a:rPr>
+              <a:t>doi.org</a:t>
+            </a:r>
+            <a:r>
+              <a:rPr sz="840" dirty="0">
+                <a:solidFill>
+                  <a:srgbClr val="1C2B27"/>
+                </a:solidFill>
+              </a:rPr>
+              <a:t>/10.1016/j.patrec.2005.10.010</a:t>
+            </a:r>
+          </a:p>
+          <a:p>
+            <a:endParaRPr sz="840" dirty="0">
+              <a:solidFill>
+                <a:srgbClr val="1C2B27"/>
+              </a:solidFill>
+            </a:endParaRPr>
+          </a:p>
+          <a:p>
+            <a:pPr>
+              <a:buNone/>
+              <a:defRPr sz="840">
+                <a:solidFill>
+                  <a:srgbClr val="1C2B27"/>
+                </a:solidFill>
+              </a:defRPr>
+            </a:pPr>
+            <a:r>
+              <a:rPr sz="840" dirty="0">
+                <a:solidFill>
+                  <a:srgbClr val="1C2B27"/>
+                </a:solidFill>
+              </a:rPr>
+              <a:t>Friedman, J. H. (2001). Greedy function approximation: A gradient boosting machine. The Annals of Statistics, 29(5), 1189-1232. https://</a:t>
+            </a:r>
+            <a:r>
+              <a:rPr sz="840" dirty="0" err="1">
+                <a:solidFill>
+                  <a:srgbClr val="1C2B27"/>
+                </a:solidFill>
+              </a:rPr>
+              <a:t>doi.org</a:t>
+            </a:r>
+            <a:r>
+              <a:rPr sz="840" dirty="0">
+                <a:solidFill>
+                  <a:srgbClr val="1C2B27"/>
+                </a:solidFill>
+              </a:rPr>
+              <a:t>/10.1214/</a:t>
+            </a:r>
+            <a:r>
+              <a:rPr sz="840" dirty="0" err="1">
+                <a:solidFill>
+                  <a:srgbClr val="1C2B27"/>
+                </a:solidFill>
+              </a:rPr>
+              <a:t>aos</a:t>
+            </a:r>
+            <a:r>
+              <a:rPr sz="840" dirty="0">
+                <a:solidFill>
+                  <a:srgbClr val="1C2B27"/>
+                </a:solidFill>
+              </a:rPr>
+              <a:t>/1013203451</a:t>
+            </a:r>
+          </a:p>
+          <a:p>
+            <a:endParaRPr sz="840" dirty="0">
+              <a:solidFill>
+                <a:srgbClr val="1C2B27"/>
+              </a:solidFill>
+            </a:endParaRPr>
+          </a:p>
+          <a:p>
+            <a:pPr>
+              <a:buNone/>
+              <a:defRPr sz="840">
+                <a:solidFill>
+                  <a:srgbClr val="1C2B27"/>
+                </a:solidFill>
+              </a:defRPr>
+            </a:pPr>
+            <a:r>
+              <a:rPr sz="840" dirty="0">
+                <a:solidFill>
+                  <a:srgbClr val="1C2B27"/>
+                </a:solidFill>
+              </a:rPr>
+              <a:t>Hastie, T., </a:t>
+            </a:r>
+            <a:r>
+              <a:rPr sz="840" dirty="0" err="1">
+                <a:solidFill>
+                  <a:srgbClr val="1C2B27"/>
+                </a:solidFill>
+              </a:rPr>
+              <a:t>Tibshirani</a:t>
+            </a:r>
+            <a:r>
+              <a:rPr sz="840" dirty="0">
+                <a:solidFill>
+                  <a:srgbClr val="1C2B27"/>
+                </a:solidFill>
+              </a:rPr>
+              <a:t>, R., </a:t>
+            </a:r>
+            <a:r>
+              <a:rPr sz="840" dirty="0" err="1">
+                <a:solidFill>
+                  <a:srgbClr val="1C2B27"/>
+                </a:solidFill>
+              </a:rPr>
+              <a:t>és</a:t>
+            </a:r>
+            <a:r>
+              <a:rPr sz="840" dirty="0">
+                <a:solidFill>
+                  <a:srgbClr val="1C2B27"/>
+                </a:solidFill>
+              </a:rPr>
+              <a:t> Friedman, J. (2009). The elements of statistical learning: Data mining, inference, and prediction (2. </a:t>
+            </a:r>
+            <a:r>
+              <a:rPr sz="840" dirty="0" err="1">
+                <a:solidFill>
+                  <a:srgbClr val="1C2B27"/>
+                </a:solidFill>
+              </a:rPr>
+              <a:t>kiad</a:t>
+            </a:r>
+            <a:r>
+              <a:rPr sz="840" dirty="0">
+                <a:solidFill>
+                  <a:srgbClr val="1C2B27"/>
+                </a:solidFill>
+              </a:rPr>
+              <a:t>.). Springer. https://</a:t>
+            </a:r>
+            <a:r>
+              <a:rPr sz="840" dirty="0" err="1">
+                <a:solidFill>
+                  <a:srgbClr val="1C2B27"/>
+                </a:solidFill>
+              </a:rPr>
+              <a:t>doi.org</a:t>
+            </a:r>
+            <a:r>
+              <a:rPr sz="840" dirty="0">
+                <a:solidFill>
+                  <a:srgbClr val="1C2B27"/>
+                </a:solidFill>
+              </a:rPr>
+              <a:t>/10.1007/978-0-387-84858-7</a:t>
+            </a:r>
+          </a:p>
+        </p:txBody>
+      </p:sp>
+      <p:sp>
+        <p:nvSpPr>
+          <p:cNvPr id="11" name="Rectangle 10">
+            <a:extLst>
+              <a:ext uri="{FF2B5EF4-FFF2-40B4-BE49-F238E27FC236}">
+                <a16:creationId xmlns:a16="http://schemas.microsoft.com/office/drawing/2014/main" id="{31CC405A-BC4A-4DE8-9419-4E879E30D7A8}"/>
+              </a:ext>
+            </a:extLst>
+          </p:cNvPr>
+          <p:cNvSpPr>
+            <a:spLocks noGrp="1"/>
+          </p:cNvSpPr>
+          <p:nvPr/>
+        </p:nvSpPr>
+        <p:spPr>
+          <a:xfrm>
+            <a:off x="6324600" y="1581150"/>
+            <a:ext cx="4819650" cy="4333875"/>
+          </a:xfrm>
+          <a:prstGeom prst="rect">
+            <a:avLst/>
+          </a:prstGeom>
+          <a:noFill/>
+          <a:ln w="0">
+            <a:noFill/>
+            <a:prstDash val="solid"/>
+          </a:ln>
+        </p:spPr>
+        <p:txBody>
+          <a:bodyPr/>
+          <a:lstStyle/>
+          <a:p>
+            <a:pPr>
+              <a:buNone/>
+              <a:defRPr sz="840">
+                <a:solidFill>
+                  <a:srgbClr val="1C2B27"/>
+                </a:solidFill>
+              </a:defRPr>
+            </a:pPr>
+            <a:r>
               <a:rPr sz="840">
                 <a:solidFill>
                   <a:srgbClr val="1C2B27"/>
                 </a:solidFill>
               </a:rPr>
-              <a:t>Breiman, L. (2001). Random forests. Machine Learning, 45, 5-32. https://doi.org/10.1023/A:1010933404324</a:t>
+              <a:t>Kuhn, M., és Johnson, K. (2013). Applied predictive modeling. Springer. https://doi.org/10.1007/978-1-4614-6849-3</a:t>
             </a:r>
           </a:p>
           <a:p>
@@ -5156,7 +6186,7 @@
                   <a:srgbClr val="1C2B27"/>
                 </a:solidFill>
               </a:rPr>
-              <a:t>Chen, T., és Guestrin, C. (2016). XGBoost: A scalable tree boosting system. In Proceedings of the 22nd ACM SIGKDD International Conference on Knowledge Discovery and Data Mining (pp. 785-794). Association for Computing Machinery. https://doi.org/10.1145/2939672.2939785</a:t>
+              <a:t>National Institute of Diabetes and Digestive and Kidney Diseases. (1990). Pima Indians Diabetes Database [Adatbázis]. UCI Machine Learning Repository. https://people.cs.georgetown.edu/~maloof/cosc388.f03/pima.names</a:t>
             </a:r>
           </a:p>
           <a:p>
@@ -5181,7 +6211,7 @@
                   <a:srgbClr val="1C2B27"/>
                 </a:solidFill>
               </a:rPr>
-              <a:t>Fawcett, T. (2006). An introduction to ROC analysis. Pattern Recognition Letters, 27(8), 861-874. https://doi.org/10.1016/j.patrec.2005.10.010</a:t>
+              <a:t>Pedregosa, F., Varoquaux, G., Gramfort, A., Michel, V., Thirion, B., Grisel, O., Blondel, M., Prettenhofer, P., Weiss, R., Dubourg, V., VanderPlas, J., Passos, A., Cournapeau, D., Brucher, M., Perrot, M., és Duchesnay, É. (2011). Scikit-learn: Machine learning in Python. Journal of Machine Learning Research, 12, 2825-2830. https://jmlr.org/papers/v12/pedregosa11a.html</a:t>
             </a:r>
           </a:p>
           <a:p>
@@ -5206,7 +6236,7 @@
                   <a:srgbClr val="1C2B27"/>
                 </a:solidFill>
               </a:rPr>
-              <a:t>Friedman, J. H. (2001). Greedy function approximation: A gradient boosting machine. The Annals of Statistics, 29(5), 1189-1232. https://doi.org/10.1214/aos/1013203451</a:t>
+              <a:t>Schulz, L. O., Bennett, P. H., Ravussin, E., Kidd, J. R., Kidd, K. K., Esparza, J., és Valencia, M. E. (2006). Effects of traditional and western environments on prevalence of type 2 diabetes in Pima Indians in Mexico and the U.S. Diabetes Care, 29(8), 1866-1871. https://doi.org/10.2337/dc06-0138</a:t>
             </a:r>
           </a:p>
           <a:p>
@@ -5231,157 +6261,6 @@
                   <a:srgbClr val="1C2B27"/>
                 </a:solidFill>
               </a:rPr>
-              <a:t>Hastie, T., Tibshirani, R., és Friedman, J. (2009). The elements of statistical learning: Data mining, inference, and prediction (2. kiad.). Springer. https://doi.org/10.1007/978-0-387-84858-7</a:t>
-            </a:r>
-          </a:p>
-        </p:txBody>
-      </p:sp>
-      <p:sp>
-        <p:nvSpPr>
-          <p:cNvPr id="11" name="Rectangle 10">
-            <a:extLst>
-              <a:ext uri="{FF2B5EF4-FFF2-40B4-BE49-F238E27FC236}">
-                <a16:creationId xmlns:a16="http://schemas.microsoft.com/office/drawing/2014/main" id="{31CC405A-BC4A-4DE8-9419-4E879E30D7A8}"/>
-              </a:ext>
-            </a:extLst>
-          </p:cNvPr>
-          <p:cNvSpPr>
-            <a:spLocks noGrp="1"/>
-          </p:cNvSpPr>
-          <p:nvPr/>
-        </p:nvSpPr>
-        <p:spPr>
-          <a:xfrm>
-            <a:off x="6324600" y="1581150"/>
-            <a:ext cx="4819650" cy="4333875"/>
-          </a:xfrm>
-          <a:prstGeom prst="rect">
-            <a:avLst/>
-          </a:prstGeom>
-          <a:noFill/>
-          <a:ln w="0">
-            <a:noFill/>
-            <a:prstDash val="solid"/>
-          </a:ln>
-        </p:spPr>
-        <p:txBody>
-          <a:bodyPr/>
-          <a:lstStyle/>
-          <a:p>
-            <a:pPr>
-              <a:buNone/>
-              <a:defRPr sz="840">
-                <a:solidFill>
-                  <a:srgbClr val="1C2B27"/>
-                </a:solidFill>
-              </a:defRPr>
-            </a:pPr>
-            <a:r>
-              <a:rPr sz="840">
-                <a:solidFill>
-                  <a:srgbClr val="1C2B27"/>
-                </a:solidFill>
-              </a:rPr>
-              <a:t>Kuhn, M., és Johnson, K. (2013). Applied predictive modeling. Springer. https://doi.org/10.1007/978-1-4614-6849-3</a:t>
-            </a:r>
-          </a:p>
-          <a:p>
-            <a:endParaRPr sz="840">
-              <a:solidFill>
-                <a:srgbClr val="1C2B27"/>
-              </a:solidFill>
-            </a:endParaRPr>
-          </a:p>
-          <a:p>
-            <a:pPr>
-              <a:buNone/>
-              <a:defRPr sz="840">
-                <a:solidFill>
-                  <a:srgbClr val="1C2B27"/>
-                </a:solidFill>
-              </a:defRPr>
-            </a:pPr>
-            <a:r>
-              <a:rPr sz="840">
-                <a:solidFill>
-                  <a:srgbClr val="1C2B27"/>
-                </a:solidFill>
-              </a:rPr>
-              <a:t>National Institute of Diabetes and Digestive and Kidney Diseases. (1990). Pima Indians Diabetes Database [Adatbázis]. UCI Machine Learning Repository. https://people.cs.georgetown.edu/~maloof/cosc388.f03/pima.names</a:t>
-            </a:r>
-          </a:p>
-          <a:p>
-            <a:endParaRPr sz="840">
-              <a:solidFill>
-                <a:srgbClr val="1C2B27"/>
-              </a:solidFill>
-            </a:endParaRPr>
-          </a:p>
-          <a:p>
-            <a:pPr>
-              <a:buNone/>
-              <a:defRPr sz="840">
-                <a:solidFill>
-                  <a:srgbClr val="1C2B27"/>
-                </a:solidFill>
-              </a:defRPr>
-            </a:pPr>
-            <a:r>
-              <a:rPr sz="840">
-                <a:solidFill>
-                  <a:srgbClr val="1C2B27"/>
-                </a:solidFill>
-              </a:rPr>
-              <a:t>Pedregosa, F., Varoquaux, G., Gramfort, A., Michel, V., Thirion, B., Grisel, O., Blondel, M., Prettenhofer, P., Weiss, R., Dubourg, V., VanderPlas, J., Passos, A., Cournapeau, D., Brucher, M., Perrot, M., és Duchesnay, É. (2011). Scikit-learn: Machine learning in Python. Journal of Machine Learning Research, 12, 2825-2830. https://jmlr.org/papers/v12/pedregosa11a.html</a:t>
-            </a:r>
-          </a:p>
-          <a:p>
-            <a:endParaRPr sz="840">
-              <a:solidFill>
-                <a:srgbClr val="1C2B27"/>
-              </a:solidFill>
-            </a:endParaRPr>
-          </a:p>
-          <a:p>
-            <a:pPr>
-              <a:buNone/>
-              <a:defRPr sz="840">
-                <a:solidFill>
-                  <a:srgbClr val="1C2B27"/>
-                </a:solidFill>
-              </a:defRPr>
-            </a:pPr>
-            <a:r>
-              <a:rPr sz="840">
-                <a:solidFill>
-                  <a:srgbClr val="1C2B27"/>
-                </a:solidFill>
-              </a:rPr>
-              <a:t>Schulz, L. O., Bennett, P. H., Ravussin, E., Kidd, J. R., Kidd, K. K., Esparza, J., és Valencia, M. E. (2006). Effects of traditional and western environments on prevalence of type 2 diabetes in Pima Indians in Mexico and the U.S. Diabetes Care, 29(8), 1866-1871. https://doi.org/10.2337/dc06-0138</a:t>
-            </a:r>
-          </a:p>
-          <a:p>
-            <a:endParaRPr sz="840">
-              <a:solidFill>
-                <a:srgbClr val="1C2B27"/>
-              </a:solidFill>
-            </a:endParaRPr>
-          </a:p>
-          <a:p>
-            <a:pPr>
-              <a:buNone/>
-              <a:defRPr sz="840">
-                <a:solidFill>
-                  <a:srgbClr val="1C2B27"/>
-                </a:solidFill>
-              </a:defRPr>
-            </a:pPr>
-            <a:r>
-              <a:rPr sz="840">
-                <a:solidFill>
-                  <a:srgbClr val="1C2B27"/>
-                </a:solidFill>
-              </a:rPr>
               <a:t>Smith, J. W., Everhart, J. E., Dickson, W. C., Knowler, W. C., és Johannes, R. S. (1988). Using the ADAP learning algorithm to forecast the onset of diabetes mellitus. In Proceedings of the Symposium on Computer Applications and Medical Care (pp. 261-265). IEEE Computer Society Press. https://pmc.ncbi.nlm.nih.gov/articles/PMC2245318/</a:t>
             </a:r>
           </a:p>
@@ -5428,13 +6307,26 @@
               </a:defRPr>
             </a:pPr>
             <a:r>
-              <a:rPr sz="900" b="1">
+              <a:rPr sz="900" b="1" dirty="0">
                 <a:solidFill>
                   <a:srgbClr val="687873"/>
                 </a:solidFill>
               </a:rPr>
-              <a:t>12</a:t>
-            </a:r>
+              <a:t>1</a:t>
+            </a:r>
+            <a:r>
+              <a:rPr lang="hu-HU" sz="900" b="1">
+                <a:solidFill>
+                  <a:srgbClr val="687873"/>
+                </a:solidFill>
+              </a:rPr>
+              <a:t>3</a:t>
+            </a:r>
+            <a:endParaRPr sz="900" b="1">
+              <a:solidFill>
+                <a:srgbClr val="687873"/>
+              </a:solidFill>
+            </a:endParaRPr>
           </a:p>
         </p:txBody>
       </p:sp>

--- a/egstat_prezentacio_v2.pptx
+++ b/egstat_prezentacio_v2.pptx
@@ -720,9 +720,7 @@
           <a:bodyPr/>
           <a:lstStyle/>
           <a:p>
-            <a:r>
-              <a:t>Kösd össze az előző diával: a logisztikus és faalapú modellek hasonló fő változókat találtak.</a:t>
-            </a:r>
+            <a:endParaRPr dirty="0"/>
           </a:p>
         </p:txBody>
       </p:sp>
@@ -797,9 +795,7 @@
           <a:bodyPr/>
           <a:lstStyle/>
           <a:p>
-            <a:r>
-              <a:t>Záró üzenet: döntési céltól függ a modellválasztás. Ne hirdess egyetlen győztest.</a:t>
-            </a:r>
+            <a:endParaRPr dirty="0"/>
           </a:p>
         </p:txBody>
       </p:sp>
@@ -978,9 +974,7 @@
           <a:bodyPr/>
           <a:lstStyle/>
           <a:p>
-            <a:r>
-              <a:t>Utolsó dia: nem csak linkek, hanem teljes hivatkozási tételek rövidített formában.</a:t>
-            </a:r>
+            <a:endParaRPr dirty="0"/>
           </a:p>
         </p:txBody>
       </p:sp>
@@ -1055,9 +1049,7 @@
           <a:bodyPr/>
           <a:lstStyle/>
           <a:p>
-            <a:r>
-              <a:t>Itt 20-30 másodpercben mondd el a bemutató logikáját. Feladatmegosztást nem kell külön említeni.</a:t>
-            </a:r>
+            <a:endParaRPr dirty="0"/>
           </a:p>
         </p:txBody>
       </p:sp>
@@ -1132,9 +1124,7 @@
           <a:bodyPr/>
           <a:lstStyle/>
           <a:p>
-            <a:r>
-              <a:t>Hangsúly: nem klinikai döntéstámogató rendszer, hanem módszertani modell-összehasonlítás.</a:t>
-            </a:r>
+            <a:endParaRPr dirty="0"/>
           </a:p>
         </p:txBody>
       </p:sp>
@@ -1209,9 +1199,7 @@
           <a:bodyPr/>
           <a:lstStyle/>
           <a:p>
-            <a:r>
-              <a:t>Itt érdemes elmondani, hogy a modell nem univerzális diabéteszmodell, hanem egy konkrét adatbázison mért összehasonlítás.</a:t>
-            </a:r>
+            <a:endParaRPr dirty="0"/>
           </a:p>
         </p:txBody>
       </p:sp>
@@ -1286,9 +1274,7 @@
           <a:bodyPr/>
           <a:lstStyle/>
           <a:p>
-            <a:r>
-              <a:t>Magyarázd el a szivárgásmentes logikát: a mediánok és a skálázás nem láthatja a tesztadatokat.</a:t>
-            </a:r>
+            <a:endParaRPr dirty="0"/>
           </a:p>
         </p:txBody>
       </p:sp>
@@ -1364,7 +1350,44 @@
           <a:lstStyle/>
           <a:p>
             <a:r>
-              <a:t>Itt ne algoritmustankönyvet tarts: a lényeg a választási kompromisszum.</a:t>
+              <a:rPr dirty="0" err="1"/>
+              <a:t>Itt</a:t>
+            </a:r>
+            <a:r>
+              <a:rPr dirty="0"/>
+              <a:t> ne </a:t>
+            </a:r>
+            <a:r>
+              <a:rPr dirty="0" err="1"/>
+              <a:t>algoritmustankönyvet</a:t>
+            </a:r>
+            <a:r>
+              <a:rPr dirty="0"/>
+              <a:t> tarts: a </a:t>
+            </a:r>
+            <a:r>
+              <a:rPr dirty="0" err="1"/>
+              <a:t>lényeg</a:t>
+            </a:r>
+            <a:r>
+              <a:rPr dirty="0"/>
+              <a:t> a </a:t>
+            </a:r>
+            <a:r>
+              <a:rPr dirty="0" err="1"/>
+              <a:t>választási</a:t>
+            </a:r>
+            <a:r>
+              <a:rPr dirty="0"/>
+              <a:t> </a:t>
+            </a:r>
+            <a:r>
+              <a:rPr dirty="0" err="1"/>
+              <a:t>kompromisszum</a:t>
+            </a:r>
+            <a:r>
+              <a:rPr dirty="0"/>
+              <a:t>.</a:t>
             </a:r>
           </a:p>
         </p:txBody>
@@ -1440,9 +1463,7 @@
           <a:bodyPr/>
           <a:lstStyle/>
           <a:p>
-            <a:r>
-              <a:t>Mutasd meg, hogy nincs drámai győztes. A modellek közel vannak egymáshoz.</a:t>
-            </a:r>
+            <a:endParaRPr dirty="0"/>
           </a:p>
         </p:txBody>
       </p:sp>
@@ -1518,7 +1539,92 @@
           <a:lstStyle/>
           <a:p>
             <a:r>
-              <a:t>Kiemelés: egészségügyben nem mindegy, hogy téves negatív vagy téves pozitív hibát vállalunk.</a:t>
+              <a:rPr lang="en-US" dirty="0" err="1"/>
+              <a:t>Kiemelés</a:t>
+            </a:r>
+            <a:r>
+              <a:rPr lang="en-US" dirty="0"/>
+              <a:t>: </a:t>
+            </a:r>
+            <a:r>
+              <a:rPr lang="en-US" dirty="0" err="1"/>
+              <a:t>egészségügyben</a:t>
+            </a:r>
+            <a:r>
+              <a:rPr lang="en-US" dirty="0"/>
+              <a:t> nem </a:t>
+            </a:r>
+            <a:r>
+              <a:rPr lang="en-US" dirty="0" err="1"/>
+              <a:t>mindegy</a:t>
+            </a:r>
+            <a:r>
+              <a:rPr lang="en-US" dirty="0"/>
+              <a:t>, </a:t>
+            </a:r>
+            <a:r>
+              <a:rPr lang="en-US" dirty="0" err="1"/>
+              <a:t>hogy</a:t>
+            </a:r>
+            <a:r>
+              <a:rPr lang="en-US" dirty="0"/>
+              <a:t> </a:t>
+            </a:r>
+            <a:r>
+              <a:rPr lang="en-US" dirty="0" err="1"/>
+              <a:t>téves</a:t>
+            </a:r>
+            <a:r>
+              <a:rPr lang="en-US" dirty="0"/>
+              <a:t> </a:t>
+            </a:r>
+            <a:r>
+              <a:rPr lang="en-US" dirty="0" err="1"/>
+              <a:t>negatív</a:t>
+            </a:r>
+            <a:r>
+              <a:rPr lang="en-US" dirty="0"/>
+              <a:t> </a:t>
+            </a:r>
+            <a:r>
+              <a:rPr lang="en-US" dirty="0" err="1"/>
+              <a:t>vagy</a:t>
+            </a:r>
+            <a:r>
+              <a:rPr lang="en-US" dirty="0"/>
+              <a:t> </a:t>
+            </a:r>
+            <a:r>
+              <a:rPr lang="en-US" dirty="0" err="1"/>
+              <a:t>téves</a:t>
+            </a:r>
+            <a:r>
+              <a:rPr lang="en-US" dirty="0"/>
+              <a:t> </a:t>
+            </a:r>
+            <a:r>
+              <a:rPr lang="en-US" dirty="0" err="1"/>
+              <a:t>pozitív</a:t>
+            </a:r>
+            <a:r>
+              <a:rPr lang="en-US" dirty="0"/>
+              <a:t> </a:t>
+            </a:r>
+            <a:r>
+              <a:rPr lang="en-US" dirty="0" err="1"/>
+              <a:t>hibát</a:t>
+            </a:r>
+            <a:r>
+              <a:rPr lang="en-US" dirty="0"/>
+              <a:t> </a:t>
+            </a:r>
+            <a:r>
+              <a:rPr lang="en-US" dirty="0" err="1"/>
+              <a:t>vállalunk</a:t>
+            </a:r>
+            <a:r>
+              <a:rPr lang="en-US" dirty="0"/>
+              <a:t>.</a:t>
             </a:r>
           </a:p>
         </p:txBody>
@@ -1594,9 +1700,7 @@
           <a:bodyPr/>
           <a:lstStyle/>
           <a:p>
-            <a:r>
-              <a:t>Itt az értelmezhetőség előnyét hangsúlyozd: a logisztikus regresszió oktatási és magyarázó célra nagyon védhető.</a:t>
-            </a:r>
+            <a:endParaRPr dirty="0"/>
           </a:p>
         </p:txBody>
       </p:sp>
@@ -6315,14 +6419,14 @@
               <a:t>1</a:t>
             </a:r>
             <a:r>
-              <a:rPr lang="hu-HU" sz="900" b="1">
+              <a:rPr lang="hu-HU" sz="900" b="1" dirty="0">
                 <a:solidFill>
                   <a:srgbClr val="687873"/>
                 </a:solidFill>
               </a:rPr>
               <a:t>3</a:t>
             </a:r>
-            <a:endParaRPr sz="900" b="1">
+            <a:endParaRPr sz="900" b="1" dirty="0">
               <a:solidFill>
                 <a:srgbClr val="687873"/>
               </a:solidFill>
